--- a/Hildesheim_Schweinberger_WordEmbeddingsLehrprobe_2026.pptx
+++ b/Hildesheim_Schweinberger_WordEmbeddingsLehrprobe_2026.pptx
@@ -17,6 +17,8 @@
     <p:sldId id="264" r:id="rId11"/>
     <p:sldId id="267" r:id="rId12"/>
     <p:sldId id="262" r:id="rId13"/>
+    <p:sldId id="271" r:id="rId14"/>
+    <p:sldId id="272" r:id="rId15"/>
   </p:sldIdLst>
   <p:sldSz cx="12192000" cy="6858000"/>
   <p:notesSz cx="6858000" cy="9144000"/>
@@ -126,7 +128,7 @@
 <file path=ppt/revisionInfo.xml><?xml version="1.0" encoding="utf-8"?>
 <p1510:revInfo xmlns:a="http://schemas.openxmlformats.org/drawingml/2006/main" xmlns:r="http://schemas.openxmlformats.org/officeDocument/2006/relationships" xmlns:p1510="http://schemas.microsoft.com/office/powerpoint/2015/10/main">
   <p1510:revLst>
-    <p1510:client id="{7A2033D2-3CA9-4F2C-886B-FD2902047F1F}" v="95" dt="2026-01-15T11:51:12.848"/>
+    <p1510:client id="{7A2033D2-3CA9-4F2C-886B-FD2902047F1F}" v="101" dt="2026-01-17T15:10:40.739"/>
   </p1510:revLst>
 </p1510:revInfo>
 </file>
@@ -136,7 +138,7 @@
   <pc:docChgLst>
     <pc:chgData name="Martin Schweinberger" userId="90c3b6fdff4c5443" providerId="LiveId" clId="{16B467C6-3D5B-4F2A-A3D4-D5D9DBF197BE}"/>
     <pc:docChg chg="custSel addSld delSld modSld sldOrd">
-      <pc:chgData name="Martin Schweinberger" userId="90c3b6fdff4c5443" providerId="LiveId" clId="{16B467C6-3D5B-4F2A-A3D4-D5D9DBF197BE}" dt="2026-01-15T11:51:27.339" v="2156" actId="27636"/>
+      <pc:chgData name="Martin Schweinberger" userId="90c3b6fdff4c5443" providerId="LiveId" clId="{16B467C6-3D5B-4F2A-A3D4-D5D9DBF197BE}" dt="2026-01-17T15:10:45.447" v="2221" actId="1076"/>
       <pc:docMkLst>
         <pc:docMk/>
       </pc:docMkLst>
@@ -200,22 +202,6 @@
             <ac:spMk id="2" creationId="{CCB49D73-BD1C-1263-686A-28624BF443E1}"/>
           </ac:spMkLst>
         </pc:spChg>
-        <pc:spChg chg="del">
-          <ac:chgData name="Martin Schweinberger" userId="90c3b6fdff4c5443" providerId="LiveId" clId="{16B467C6-3D5B-4F2A-A3D4-D5D9DBF197BE}" dt="2026-01-15T10:33:37.146" v="937" actId="478"/>
-          <ac:spMkLst>
-            <pc:docMk/>
-            <pc:sldMk cId="1715540663" sldId="260"/>
-            <ac:spMk id="3" creationId="{79D6A404-2E3C-D539-5E59-D67338DDC5B2}"/>
-          </ac:spMkLst>
-        </pc:spChg>
-        <pc:picChg chg="del">
-          <ac:chgData name="Martin Schweinberger" userId="90c3b6fdff4c5443" providerId="LiveId" clId="{16B467C6-3D5B-4F2A-A3D4-D5D9DBF197BE}" dt="2026-01-15T10:33:44.857" v="939" actId="478"/>
-          <ac:picMkLst>
-            <pc:docMk/>
-            <pc:sldMk cId="1715540663" sldId="260"/>
-            <ac:picMk id="4" creationId="{AA96F7A6-06F6-B0AB-B1C8-B5212662CCEF}"/>
-          </ac:picMkLst>
-        </pc:picChg>
         <pc:picChg chg="add">
           <ac:chgData name="Martin Schweinberger" userId="90c3b6fdff4c5443" providerId="LiveId" clId="{16B467C6-3D5B-4F2A-A3D4-D5D9DBF197BE}" dt="2026-01-15T10:33:39.983" v="938"/>
           <ac:picMkLst>
@@ -224,45 +210,6 @@
             <ac:picMk id="2050" creationId="{6BF7BBE4-3D08-A230-F160-E9B520B64B4D}"/>
           </ac:picMkLst>
         </pc:picChg>
-      </pc:sldChg>
-      <pc:sldChg chg="addSp delSp modSp del mod ord">
-        <pc:chgData name="Martin Schweinberger" userId="90c3b6fdff4c5443" providerId="LiveId" clId="{16B467C6-3D5B-4F2A-A3D4-D5D9DBF197BE}" dt="2026-01-15T11:50:54.571" v="2146" actId="47"/>
-        <pc:sldMkLst>
-          <pc:docMk/>
-          <pc:sldMk cId="4163067646" sldId="261"/>
-        </pc:sldMkLst>
-        <pc:spChg chg="mod">
-          <ac:chgData name="Martin Schweinberger" userId="90c3b6fdff4c5443" providerId="LiveId" clId="{16B467C6-3D5B-4F2A-A3D4-D5D9DBF197BE}" dt="2026-01-15T09:46:18.043" v="106" actId="20577"/>
-          <ac:spMkLst>
-            <pc:docMk/>
-            <pc:sldMk cId="4163067646" sldId="261"/>
-            <ac:spMk id="2" creationId="{E53C4E6A-4FDC-829C-9FBD-6E631E3A0BCF}"/>
-          </ac:spMkLst>
-        </pc:spChg>
-        <pc:spChg chg="del mod">
-          <ac:chgData name="Martin Schweinberger" userId="90c3b6fdff4c5443" providerId="LiveId" clId="{16B467C6-3D5B-4F2A-A3D4-D5D9DBF197BE}" dt="2026-01-15T09:45:25.987" v="56"/>
-          <ac:spMkLst>
-            <pc:docMk/>
-            <pc:sldMk cId="4163067646" sldId="261"/>
-            <ac:spMk id="3" creationId="{9531557B-5224-B38B-16F6-EBF9D0EF24AA}"/>
-          </ac:spMkLst>
-        </pc:spChg>
-        <pc:spChg chg="add mod">
-          <ac:chgData name="Martin Schweinberger" userId="90c3b6fdff4c5443" providerId="LiveId" clId="{16B467C6-3D5B-4F2A-A3D4-D5D9DBF197BE}" dt="2026-01-15T11:21:39.166" v="1399" actId="14100"/>
-          <ac:spMkLst>
-            <pc:docMk/>
-            <pc:sldMk cId="4163067646" sldId="261"/>
-            <ac:spMk id="6" creationId="{053974B3-8FCB-56A5-B837-E9A43C17631A}"/>
-          </ac:spMkLst>
-        </pc:spChg>
-        <pc:graphicFrameChg chg="add mod modGraphic">
-          <ac:chgData name="Martin Schweinberger" userId="90c3b6fdff4c5443" providerId="LiveId" clId="{16B467C6-3D5B-4F2A-A3D4-D5D9DBF197BE}" dt="2026-01-15T09:57:11.276" v="875" actId="1076"/>
-          <ac:graphicFrameMkLst>
-            <pc:docMk/>
-            <pc:sldMk cId="4163067646" sldId="261"/>
-            <ac:graphicFrameMk id="5" creationId="{625586FF-C2FD-D36E-F078-7AD3BACB7791}"/>
-          </ac:graphicFrameMkLst>
-        </pc:graphicFrameChg>
       </pc:sldChg>
       <pc:sldChg chg="modSp ord">
         <pc:chgData name="Martin Schweinberger" userId="90c3b6fdff4c5443" providerId="LiveId" clId="{16B467C6-3D5B-4F2A-A3D4-D5D9DBF197BE}" dt="2026-01-15T11:28:41.922" v="1663"/>
@@ -322,52 +269,6 @@
             <pc:docMk/>
             <pc:sldMk cId="2639961377" sldId="264"/>
             <ac:spMk id="3" creationId="{38459097-7066-0674-2098-EDF1608163B5}"/>
-          </ac:spMkLst>
-        </pc:spChg>
-      </pc:sldChg>
-      <pc:sldChg chg="addSp delSp modSp add del mod ord">
-        <pc:chgData name="Martin Schweinberger" userId="90c3b6fdff4c5443" providerId="LiveId" clId="{16B467C6-3D5B-4F2A-A3D4-D5D9DBF197BE}" dt="2026-01-15T11:25:50.136" v="1576" actId="47"/>
-        <pc:sldMkLst>
-          <pc:docMk/>
-          <pc:sldMk cId="2402766250" sldId="265"/>
-        </pc:sldMkLst>
-        <pc:spChg chg="mod">
-          <ac:chgData name="Martin Schweinberger" userId="90c3b6fdff4c5443" providerId="LiveId" clId="{16B467C6-3D5B-4F2A-A3D4-D5D9DBF197BE}" dt="2026-01-15T11:13:39.664" v="1223" actId="27636"/>
-          <ac:spMkLst>
-            <pc:docMk/>
-            <pc:sldMk cId="2402766250" sldId="265"/>
-            <ac:spMk id="6" creationId="{D8E12836-054D-5984-0EEA-BE8E0E68C367}"/>
-          </ac:spMkLst>
-        </pc:spChg>
-        <pc:spChg chg="add del mod">
-          <ac:chgData name="Martin Schweinberger" userId="90c3b6fdff4c5443" providerId="LiveId" clId="{16B467C6-3D5B-4F2A-A3D4-D5D9DBF197BE}" dt="2026-01-15T11:09:29.459" v="1048" actId="478"/>
-          <ac:spMkLst>
-            <pc:docMk/>
-            <pc:sldMk cId="2402766250" sldId="265"/>
-            <ac:spMk id="7" creationId="{97B30DAB-EDA5-496D-0238-809EBEFD6949}"/>
-          </ac:spMkLst>
-        </pc:spChg>
-        <pc:graphicFrameChg chg="del">
-          <ac:chgData name="Martin Schweinberger" userId="90c3b6fdff4c5443" providerId="LiveId" clId="{16B467C6-3D5B-4F2A-A3D4-D5D9DBF197BE}" dt="2026-01-15T11:09:26.370" v="1047" actId="478"/>
-          <ac:graphicFrameMkLst>
-            <pc:docMk/>
-            <pc:sldMk cId="2402766250" sldId="265"/>
-            <ac:graphicFrameMk id="5" creationId="{DF65E9CC-81F8-55BC-32A6-0A74B4ABEDD1}"/>
-          </ac:graphicFrameMkLst>
-        </pc:graphicFrameChg>
-      </pc:sldChg>
-      <pc:sldChg chg="modSp add del mod ord">
-        <pc:chgData name="Martin Schweinberger" userId="90c3b6fdff4c5443" providerId="LiveId" clId="{16B467C6-3D5B-4F2A-A3D4-D5D9DBF197BE}" dt="2026-01-15T11:51:22.373" v="2154" actId="47"/>
-        <pc:sldMkLst>
-          <pc:docMk/>
-          <pc:sldMk cId="1125648515" sldId="266"/>
-        </pc:sldMkLst>
-        <pc:spChg chg="mod">
-          <ac:chgData name="Martin Schweinberger" userId="90c3b6fdff4c5443" providerId="LiveId" clId="{16B467C6-3D5B-4F2A-A3D4-D5D9DBF197BE}" dt="2026-01-15T11:28:18.895" v="1662" actId="20577"/>
-          <ac:spMkLst>
-            <pc:docMk/>
-            <pc:sldMk cId="1125648515" sldId="266"/>
-            <ac:spMk id="6" creationId="{035F486E-839F-5A98-D464-EC8FBD8F8A57}"/>
           </ac:spMkLst>
         </pc:spChg>
       </pc:sldChg>
@@ -487,6 +388,84 @@
           </ac:picMkLst>
         </pc:picChg>
       </pc:sldChg>
+      <pc:sldChg chg="addSp delSp modSp add mod">
+        <pc:chgData name="Martin Schweinberger" userId="90c3b6fdff4c5443" providerId="LiveId" clId="{16B467C6-3D5B-4F2A-A3D4-D5D9DBF197BE}" dt="2026-01-17T15:10:45.447" v="2221" actId="1076"/>
+        <pc:sldMkLst>
+          <pc:docMk/>
+          <pc:sldMk cId="4179351054" sldId="271"/>
+        </pc:sldMkLst>
+        <pc:spChg chg="mod">
+          <ac:chgData name="Martin Schweinberger" userId="90c3b6fdff4c5443" providerId="LiveId" clId="{16B467C6-3D5B-4F2A-A3D4-D5D9DBF197BE}" dt="2026-01-17T15:07:52.539" v="2200" actId="6549"/>
+          <ac:spMkLst>
+            <pc:docMk/>
+            <pc:sldMk cId="4179351054" sldId="271"/>
+            <ac:spMk id="2" creationId="{D22F7390-32A4-D059-E94A-AD945937057F}"/>
+          </ac:spMkLst>
+        </pc:spChg>
+        <pc:picChg chg="mod">
+          <ac:chgData name="Martin Schweinberger" userId="90c3b6fdff4c5443" providerId="LiveId" clId="{16B467C6-3D5B-4F2A-A3D4-D5D9DBF197BE}" dt="2026-01-17T15:10:40.739" v="2220" actId="166"/>
+          <ac:picMkLst>
+            <pc:docMk/>
+            <pc:sldMk cId="4179351054" sldId="271"/>
+            <ac:picMk id="4" creationId="{C16F059B-1344-8204-0966-50F5F6B659C5}"/>
+          </ac:picMkLst>
+        </pc:picChg>
+        <pc:picChg chg="del">
+          <ac:chgData name="Martin Schweinberger" userId="90c3b6fdff4c5443" providerId="LiveId" clId="{16B467C6-3D5B-4F2A-A3D4-D5D9DBF197BE}" dt="2026-01-17T15:07:25.523" v="2192" actId="478"/>
+          <ac:picMkLst>
+            <pc:docMk/>
+            <pc:sldMk cId="4179351054" sldId="271"/>
+            <ac:picMk id="5" creationId="{857972FB-462F-90AB-786A-4215B5821E73}"/>
+          </ac:picMkLst>
+        </pc:picChg>
+        <pc:picChg chg="add mod">
+          <ac:chgData name="Martin Schweinberger" userId="90c3b6fdff4c5443" providerId="LiveId" clId="{16B467C6-3D5B-4F2A-A3D4-D5D9DBF197BE}" dt="2026-01-17T15:10:45.447" v="2221" actId="1076"/>
+          <ac:picMkLst>
+            <pc:docMk/>
+            <pc:sldMk cId="4179351054" sldId="271"/>
+            <ac:picMk id="6" creationId="{FCE39AB3-8165-7AB7-F40D-239BC81BDFCB}"/>
+          </ac:picMkLst>
+        </pc:picChg>
+      </pc:sldChg>
+      <pc:sldChg chg="addSp delSp modSp add mod">
+        <pc:chgData name="Martin Schweinberger" userId="90c3b6fdff4c5443" providerId="LiveId" clId="{16B467C6-3D5B-4F2A-A3D4-D5D9DBF197BE}" dt="2026-01-17T15:10:04.725" v="2218" actId="1076"/>
+        <pc:sldMkLst>
+          <pc:docMk/>
+          <pc:sldMk cId="628969876" sldId="272"/>
+        </pc:sldMkLst>
+        <pc:spChg chg="mod">
+          <ac:chgData name="Martin Schweinberger" userId="90c3b6fdff4c5443" providerId="LiveId" clId="{16B467C6-3D5B-4F2A-A3D4-D5D9DBF197BE}" dt="2026-01-17T15:09:41.553" v="2212" actId="20577"/>
+          <ac:spMkLst>
+            <pc:docMk/>
+            <pc:sldMk cId="628969876" sldId="272"/>
+            <ac:spMk id="2" creationId="{55493790-FAA3-B045-8AC8-BF52D0724722}"/>
+          </ac:spMkLst>
+        </pc:spChg>
+        <pc:picChg chg="mod">
+          <ac:chgData name="Martin Schweinberger" userId="90c3b6fdff4c5443" providerId="LiveId" clId="{16B467C6-3D5B-4F2A-A3D4-D5D9DBF197BE}" dt="2026-01-17T15:10:00.611" v="2217" actId="166"/>
+          <ac:picMkLst>
+            <pc:docMk/>
+            <pc:sldMk cId="628969876" sldId="272"/>
+            <ac:picMk id="4" creationId="{CEB4AA64-7157-4CB5-A7F3-9FA822BEC6F0}"/>
+          </ac:picMkLst>
+        </pc:picChg>
+        <pc:picChg chg="add mod">
+          <ac:chgData name="Martin Schweinberger" userId="90c3b6fdff4c5443" providerId="LiveId" clId="{16B467C6-3D5B-4F2A-A3D4-D5D9DBF197BE}" dt="2026-01-17T15:10:04.725" v="2218" actId="1076"/>
+          <ac:picMkLst>
+            <pc:docMk/>
+            <pc:sldMk cId="628969876" sldId="272"/>
+            <ac:picMk id="5" creationId="{689A12F3-71E9-DA43-1DD4-04EA5725C6B8}"/>
+          </ac:picMkLst>
+        </pc:picChg>
+        <pc:picChg chg="del">
+          <ac:chgData name="Martin Schweinberger" userId="90c3b6fdff4c5443" providerId="LiveId" clId="{16B467C6-3D5B-4F2A-A3D4-D5D9DBF197BE}" dt="2026-01-17T15:08:54.262" v="2203" actId="478"/>
+          <ac:picMkLst>
+            <pc:docMk/>
+            <pc:sldMk cId="628969876" sldId="272"/>
+            <ac:picMk id="6" creationId="{D51B6254-9DD9-B210-7502-CEC5265E3B18}"/>
+          </ac:picMkLst>
+        </pc:picChg>
+      </pc:sldChg>
     </pc:docChg>
   </pc:docChgLst>
 </pc:chgInfo>
@@ -641,7 +620,7 @@
           <a:p>
             <a:fld id="{432F9C24-DDFF-4E31-A489-F4034B433D9F}" type="datetimeFigureOut">
               <a:rPr lang="en-AU" smtClean="0"/>
-              <a:t>15/01/2026</a:t>
+              <a:t>17/01/2026</a:t>
             </a:fld>
             <a:endParaRPr lang="en-AU"/>
           </a:p>
@@ -841,7 +820,7 @@
           <a:p>
             <a:fld id="{432F9C24-DDFF-4E31-A489-F4034B433D9F}" type="datetimeFigureOut">
               <a:rPr lang="en-AU" smtClean="0"/>
-              <a:t>15/01/2026</a:t>
+              <a:t>17/01/2026</a:t>
             </a:fld>
             <a:endParaRPr lang="en-AU"/>
           </a:p>
@@ -1051,7 +1030,7 @@
           <a:p>
             <a:fld id="{432F9C24-DDFF-4E31-A489-F4034B433D9F}" type="datetimeFigureOut">
               <a:rPr lang="en-AU" smtClean="0"/>
-              <a:t>15/01/2026</a:t>
+              <a:t>17/01/2026</a:t>
             </a:fld>
             <a:endParaRPr lang="en-AU"/>
           </a:p>
@@ -1251,7 +1230,7 @@
           <a:p>
             <a:fld id="{432F9C24-DDFF-4E31-A489-F4034B433D9F}" type="datetimeFigureOut">
               <a:rPr lang="en-AU" smtClean="0"/>
-              <a:t>15/01/2026</a:t>
+              <a:t>17/01/2026</a:t>
             </a:fld>
             <a:endParaRPr lang="en-AU"/>
           </a:p>
@@ -1527,7 +1506,7 @@
           <a:p>
             <a:fld id="{432F9C24-DDFF-4E31-A489-F4034B433D9F}" type="datetimeFigureOut">
               <a:rPr lang="en-AU" smtClean="0"/>
-              <a:t>15/01/2026</a:t>
+              <a:t>17/01/2026</a:t>
             </a:fld>
             <a:endParaRPr lang="en-AU"/>
           </a:p>
@@ -1795,7 +1774,7 @@
           <a:p>
             <a:fld id="{432F9C24-DDFF-4E31-A489-F4034B433D9F}" type="datetimeFigureOut">
               <a:rPr lang="en-AU" smtClean="0"/>
-              <a:t>15/01/2026</a:t>
+              <a:t>17/01/2026</a:t>
             </a:fld>
             <a:endParaRPr lang="en-AU"/>
           </a:p>
@@ -2210,7 +2189,7 @@
           <a:p>
             <a:fld id="{432F9C24-DDFF-4E31-A489-F4034B433D9F}" type="datetimeFigureOut">
               <a:rPr lang="en-AU" smtClean="0"/>
-              <a:t>15/01/2026</a:t>
+              <a:t>17/01/2026</a:t>
             </a:fld>
             <a:endParaRPr lang="en-AU"/>
           </a:p>
@@ -2352,7 +2331,7 @@
           <a:p>
             <a:fld id="{432F9C24-DDFF-4E31-A489-F4034B433D9F}" type="datetimeFigureOut">
               <a:rPr lang="en-AU" smtClean="0"/>
-              <a:t>15/01/2026</a:t>
+              <a:t>17/01/2026</a:t>
             </a:fld>
             <a:endParaRPr lang="en-AU"/>
           </a:p>
@@ -2465,7 +2444,7 @@
           <a:p>
             <a:fld id="{432F9C24-DDFF-4E31-A489-F4034B433D9F}" type="datetimeFigureOut">
               <a:rPr lang="en-AU" smtClean="0"/>
-              <a:t>15/01/2026</a:t>
+              <a:t>17/01/2026</a:t>
             </a:fld>
             <a:endParaRPr lang="en-AU"/>
           </a:p>
@@ -2778,7 +2757,7 @@
           <a:p>
             <a:fld id="{432F9C24-DDFF-4E31-A489-F4034B433D9F}" type="datetimeFigureOut">
               <a:rPr lang="en-AU" smtClean="0"/>
-              <a:t>15/01/2026</a:t>
+              <a:t>17/01/2026</a:t>
             </a:fld>
             <a:endParaRPr lang="en-AU"/>
           </a:p>
@@ -3067,7 +3046,7 @@
           <a:p>
             <a:fld id="{432F9C24-DDFF-4E31-A489-F4034B433D9F}" type="datetimeFigureOut">
               <a:rPr lang="en-AU" smtClean="0"/>
-              <a:t>15/01/2026</a:t>
+              <a:t>17/01/2026</a:t>
             </a:fld>
             <a:endParaRPr lang="en-AU"/>
           </a:p>
@@ -3310,7 +3289,7 @@
           <a:p>
             <a:fld id="{432F9C24-DDFF-4E31-A489-F4034B433D9F}" type="datetimeFigureOut">
               <a:rPr lang="en-AU" smtClean="0"/>
-              <a:t>15/01/2026</a:t>
+              <a:t>17/01/2026</a:t>
             </a:fld>
             <a:endParaRPr lang="en-AU"/>
           </a:p>
@@ -4585,6 +4564,315 @@
     <p:extLst>
       <p:ext uri="{BB962C8B-B14F-4D97-AF65-F5344CB8AC3E}">
         <p14:creationId xmlns:p14="http://schemas.microsoft.com/office/powerpoint/2010/main" val="2785510872"/>
+      </p:ext>
+    </p:extLst>
+  </p:cSld>
+  <p:clrMapOvr>
+    <a:masterClrMapping/>
+  </p:clrMapOvr>
+</p:sld>
+</file>
+
+<file path=ppt/slides/slide13.xml><?xml version="1.0" encoding="utf-8"?>
+<p:sld xmlns:a="http://schemas.openxmlformats.org/drawingml/2006/main" xmlns:r="http://schemas.openxmlformats.org/officeDocument/2006/relationships" xmlns:p="http://schemas.openxmlformats.org/presentationml/2006/main">
+  <p:cSld>
+    <p:spTree>
+      <p:nvGrpSpPr>
+        <p:cNvPr id="1" name="">
+          <a:extLst>
+            <a:ext uri="{FF2B5EF4-FFF2-40B4-BE49-F238E27FC236}">
+              <a16:creationId xmlns:a16="http://schemas.microsoft.com/office/drawing/2014/main" id="{9A2A075D-3C38-7FC6-6EBA-7632CC4EE11E}"/>
+            </a:ext>
+          </a:extLst>
+        </p:cNvPr>
+        <p:cNvGrpSpPr/>
+        <p:nvPr/>
+      </p:nvGrpSpPr>
+      <p:grpSpPr>
+        <a:xfrm>
+          <a:off x="0" y="0"/>
+          <a:ext cx="0" cy="0"/>
+          <a:chOff x="0" y="0"/>
+          <a:chExt cx="0" cy="0"/>
+        </a:xfrm>
+      </p:grpSpPr>
+      <p:sp>
+        <p:nvSpPr>
+          <p:cNvPr id="2" name="Title 1">
+            <a:extLst>
+              <a:ext uri="{FF2B5EF4-FFF2-40B4-BE49-F238E27FC236}">
+                <a16:creationId xmlns:a16="http://schemas.microsoft.com/office/drawing/2014/main" id="{D22F7390-32A4-D059-E94A-AD945937057F}"/>
+              </a:ext>
+            </a:extLst>
+          </p:cNvPr>
+          <p:cNvSpPr>
+            <a:spLocks noGrp="1"/>
+          </p:cNvSpPr>
+          <p:nvPr>
+            <p:ph type="title"/>
+          </p:nvPr>
+        </p:nvSpPr>
+        <p:spPr/>
+        <p:txBody>
+          <a:bodyPr>
+            <a:normAutofit/>
+          </a:bodyPr>
+          <a:lstStyle/>
+          <a:p>
+            <a:r>
+              <a:rPr lang="de-DE" dirty="0"/>
+              <a:t>Einbettung in </a:t>
+            </a:r>
+            <a:r>
+              <a:rPr lang="en-AU" dirty="0" err="1"/>
+              <a:t>Gesamtkonzeption</a:t>
+            </a:r>
+            <a:r>
+              <a:rPr lang="en-AU" dirty="0"/>
+              <a:t> </a:t>
+            </a:r>
+          </a:p>
+        </p:txBody>
+      </p:sp>
+      <p:pic>
+        <p:nvPicPr>
+          <p:cNvPr id="6" name="Picture 5">
+            <a:extLst>
+              <a:ext uri="{FF2B5EF4-FFF2-40B4-BE49-F238E27FC236}">
+                <a16:creationId xmlns:a16="http://schemas.microsoft.com/office/drawing/2014/main" id="{FCE39AB3-8165-7AB7-F40D-239BC81BDFCB}"/>
+              </a:ext>
+            </a:extLst>
+          </p:cNvPr>
+          <p:cNvPicPr>
+            <a:picLocks noChangeAspect="1"/>
+          </p:cNvPicPr>
+          <p:nvPr/>
+        </p:nvPicPr>
+        <p:blipFill>
+          <a:blip r:embed="rId2"/>
+          <a:stretch>
+            <a:fillRect/>
+          </a:stretch>
+        </p:blipFill>
+        <p:spPr>
+          <a:xfrm>
+            <a:off x="594463" y="1441494"/>
+            <a:ext cx="11435611" cy="5398177"/>
+          </a:xfrm>
+          <a:prstGeom prst="rect">
+            <a:avLst/>
+          </a:prstGeom>
+        </p:spPr>
+      </p:pic>
+      <p:pic>
+        <p:nvPicPr>
+          <p:cNvPr id="4" name="Picture 2">
+            <a:extLst>
+              <a:ext uri="{FF2B5EF4-FFF2-40B4-BE49-F238E27FC236}">
+                <a16:creationId xmlns:a16="http://schemas.microsoft.com/office/drawing/2014/main" id="{C16F059B-1344-8204-0966-50F5F6B659C5}"/>
+              </a:ext>
+            </a:extLst>
+          </p:cNvPr>
+          <p:cNvPicPr>
+            <a:picLocks noChangeAspect="1" noChangeArrowheads="1"/>
+          </p:cNvPicPr>
+          <p:nvPr/>
+        </p:nvPicPr>
+        <p:blipFill>
+          <a:blip r:embed="rId3">
+            <a:extLst>
+              <a:ext uri="{28A0092B-C50C-407E-A947-70E740481C1C}">
+                <a14:useLocalDpi xmlns:a14="http://schemas.microsoft.com/office/drawing/2010/main" val="0"/>
+              </a:ext>
+            </a:extLst>
+          </a:blip>
+          <a:srcRect/>
+          <a:stretch>
+            <a:fillRect/>
+          </a:stretch>
+        </p:blipFill>
+        <p:spPr bwMode="auto">
+          <a:xfrm>
+            <a:off x="10607488" y="18329"/>
+            <a:ext cx="1584512" cy="1581871"/>
+          </a:xfrm>
+          <a:prstGeom prst="rect">
+            <a:avLst/>
+          </a:prstGeom>
+          <a:noFill/>
+          <a:extLst>
+            <a:ext uri="{909E8E84-426E-40DD-AFC4-6F175D3DCCD1}">
+              <a14:hiddenFill xmlns:a14="http://schemas.microsoft.com/office/drawing/2010/main">
+                <a:solidFill>
+                  <a:srgbClr val="FFFFFF"/>
+                </a:solidFill>
+              </a14:hiddenFill>
+            </a:ext>
+          </a:extLst>
+        </p:spPr>
+      </p:pic>
+    </p:spTree>
+    <p:extLst>
+      <p:ext uri="{BB962C8B-B14F-4D97-AF65-F5344CB8AC3E}">
+        <p14:creationId xmlns:p14="http://schemas.microsoft.com/office/powerpoint/2010/main" val="4179351054"/>
+      </p:ext>
+    </p:extLst>
+  </p:cSld>
+  <p:clrMapOvr>
+    <a:masterClrMapping/>
+  </p:clrMapOvr>
+</p:sld>
+</file>
+
+<file path=ppt/slides/slide14.xml><?xml version="1.0" encoding="utf-8"?>
+<p:sld xmlns:a="http://schemas.openxmlformats.org/drawingml/2006/main" xmlns:r="http://schemas.openxmlformats.org/officeDocument/2006/relationships" xmlns:p="http://schemas.openxmlformats.org/presentationml/2006/main">
+  <p:cSld>
+    <p:spTree>
+      <p:nvGrpSpPr>
+        <p:cNvPr id="1" name="">
+          <a:extLst>
+            <a:ext uri="{FF2B5EF4-FFF2-40B4-BE49-F238E27FC236}">
+              <a16:creationId xmlns:a16="http://schemas.microsoft.com/office/drawing/2014/main" id="{41125B4F-5705-7118-73EE-8C584895EA32}"/>
+            </a:ext>
+          </a:extLst>
+        </p:cNvPr>
+        <p:cNvGrpSpPr/>
+        <p:nvPr/>
+      </p:nvGrpSpPr>
+      <p:grpSpPr>
+        <a:xfrm>
+          <a:off x="0" y="0"/>
+          <a:ext cx="0" cy="0"/>
+          <a:chOff x="0" y="0"/>
+          <a:chExt cx="0" cy="0"/>
+        </a:xfrm>
+      </p:grpSpPr>
+      <p:sp>
+        <p:nvSpPr>
+          <p:cNvPr id="2" name="Title 1">
+            <a:extLst>
+              <a:ext uri="{FF2B5EF4-FFF2-40B4-BE49-F238E27FC236}">
+                <a16:creationId xmlns:a16="http://schemas.microsoft.com/office/drawing/2014/main" id="{55493790-FAA3-B045-8AC8-BF52D0724722}"/>
+              </a:ext>
+            </a:extLst>
+          </p:cNvPr>
+          <p:cNvSpPr>
+            <a:spLocks noGrp="1"/>
+          </p:cNvSpPr>
+          <p:nvPr>
+            <p:ph type="title"/>
+          </p:nvPr>
+        </p:nvSpPr>
+        <p:spPr/>
+        <p:txBody>
+          <a:bodyPr>
+            <a:normAutofit fontScale="90000"/>
+          </a:bodyPr>
+          <a:lstStyle/>
+          <a:p>
+            <a:r>
+              <a:rPr lang="de-DE" dirty="0"/>
+              <a:t>Seminarstruktur &amp; Progression</a:t>
+            </a:r>
+            <a:br>
+              <a:rPr lang="de-DE" dirty="0"/>
+            </a:br>
+            <a:r>
+              <a:rPr lang="de-DE" dirty="0"/>
+              <a:t>Von linguistischen Grundlagen zu kritischer </a:t>
+            </a:r>
+            <a:br>
+              <a:rPr lang="de-DE" dirty="0"/>
+            </a:br>
+            <a:r>
+              <a:rPr lang="de-DE" dirty="0"/>
+              <a:t>KI-Analyse</a:t>
+            </a:r>
+            <a:endParaRPr lang="en-AU" dirty="0"/>
+          </a:p>
+        </p:txBody>
+      </p:sp>
+      <p:pic>
+        <p:nvPicPr>
+          <p:cNvPr id="5" name="Picture 4">
+            <a:extLst>
+              <a:ext uri="{FF2B5EF4-FFF2-40B4-BE49-F238E27FC236}">
+                <a16:creationId xmlns:a16="http://schemas.microsoft.com/office/drawing/2014/main" id="{689A12F3-71E9-DA43-1DD4-04EA5725C6B8}"/>
+              </a:ext>
+            </a:extLst>
+          </p:cNvPr>
+          <p:cNvPicPr>
+            <a:picLocks noChangeAspect="1"/>
+          </p:cNvPicPr>
+          <p:nvPr/>
+        </p:nvPicPr>
+        <p:blipFill>
+          <a:blip r:embed="rId2"/>
+          <a:stretch>
+            <a:fillRect/>
+          </a:stretch>
+        </p:blipFill>
+        <p:spPr>
+          <a:xfrm>
+            <a:off x="3121819" y="1292064"/>
+            <a:ext cx="7743826" cy="5445976"/>
+          </a:xfrm>
+          <a:prstGeom prst="rect">
+            <a:avLst/>
+          </a:prstGeom>
+        </p:spPr>
+      </p:pic>
+      <p:pic>
+        <p:nvPicPr>
+          <p:cNvPr id="4" name="Picture 2">
+            <a:extLst>
+              <a:ext uri="{FF2B5EF4-FFF2-40B4-BE49-F238E27FC236}">
+                <a16:creationId xmlns:a16="http://schemas.microsoft.com/office/drawing/2014/main" id="{CEB4AA64-7157-4CB5-A7F3-9FA822BEC6F0}"/>
+              </a:ext>
+            </a:extLst>
+          </p:cNvPr>
+          <p:cNvPicPr>
+            <a:picLocks noChangeAspect="1" noChangeArrowheads="1"/>
+          </p:cNvPicPr>
+          <p:nvPr/>
+        </p:nvPicPr>
+        <p:blipFill>
+          <a:blip r:embed="rId3">
+            <a:extLst>
+              <a:ext uri="{28A0092B-C50C-407E-A947-70E740481C1C}">
+                <a14:useLocalDpi xmlns:a14="http://schemas.microsoft.com/office/drawing/2010/main" val="0"/>
+              </a:ext>
+            </a:extLst>
+          </a:blip>
+          <a:srcRect/>
+          <a:stretch>
+            <a:fillRect/>
+          </a:stretch>
+        </p:blipFill>
+        <p:spPr bwMode="auto">
+          <a:xfrm>
+            <a:off x="10607488" y="18329"/>
+            <a:ext cx="1584512" cy="1581871"/>
+          </a:xfrm>
+          <a:prstGeom prst="rect">
+            <a:avLst/>
+          </a:prstGeom>
+          <a:noFill/>
+          <a:extLst>
+            <a:ext uri="{909E8E84-426E-40DD-AFC4-6F175D3DCCD1}">
+              <a14:hiddenFill xmlns:a14="http://schemas.microsoft.com/office/drawing/2010/main">
+                <a:solidFill>
+                  <a:srgbClr val="FFFFFF"/>
+                </a:solidFill>
+              </a14:hiddenFill>
+            </a:ext>
+          </a:extLst>
+        </p:spPr>
+      </p:pic>
+    </p:spTree>
+    <p:extLst>
+      <p:ext uri="{BB962C8B-B14F-4D97-AF65-F5344CB8AC3E}">
+        <p14:creationId xmlns:p14="http://schemas.microsoft.com/office/powerpoint/2010/main" val="628969876"/>
       </p:ext>
     </p:extLst>
   </p:cSld>
